--- a/評価レポート/2026-09-21_散乱の導入方針_WIN250046_Claude.pptx
+++ b/評価レポート/2026-09-21_散乱の導入方針_WIN250046_Claude.pptx
@@ -26126,7 +26126,7 @@
                 </a:solidFill>
                 <a:latin typeface="Meiryo"/>
               </a:rPr>
-              <a:t>・インパルス応答は位相を持つ複素和（査読論文 式(2)）。散乱音には決まった位相が無いので、どこまでを複素和のまま扱うかを決める必要がある（13 ページ）。</a:t>
+              <a:t>・インパルス応答は位相を持つ複素和（査読論文 式(2)）。散乱音には決まった位相が無いので、どこまでを複素和のまま扱うかを決める必要がある（「位相をどう扱うか」のページ）。</a:t>
             </a:r>
           </a:p>
         </p:txBody>
@@ -27428,7 +27428,26 @@
                 </a:solidFill>
                 <a:latin typeface="Meiryo"/>
               </a:rPr>
-              <a:t>確率的散乱（モンテカルロ）</a:t>
+              <a:t>確率的散乱</a:t>
+            </a:r>
+          </a:p>
+          <a:p>
+            <a:pPr algn="ctr">
+              <a:lnSpc>
+                <a:spcPct val="115000"/>
+              </a:lnSpc>
+              <a:spcAft>
+                <a:spcPts val="0"/>
+              </a:spcAft>
+            </a:pPr>
+            <a:r>
+              <a:rPr sz="1250" b="1">
+                <a:solidFill>
+                  <a:srgbClr val="1B254B"/>
+                </a:solidFill>
+                <a:latin typeface="Meiryo"/>
+              </a:rPr>
+              <a:t>（モンテカルロ）</a:t>
             </a:r>
           </a:p>
         </p:txBody>
@@ -27630,7 +27649,26 @@
                 </a:solidFill>
                 <a:latin typeface="Meiryo"/>
               </a:rPr>
-              <a:t>2 次音源（diffuse rain）</a:t>
+              <a:t>2 次音源</a:t>
+            </a:r>
+          </a:p>
+          <a:p>
+            <a:pPr algn="ctr">
+              <a:lnSpc>
+                <a:spcPct val="115000"/>
+              </a:lnSpc>
+              <a:spcAft>
+                <a:spcPts val="0"/>
+              </a:spcAft>
+            </a:pPr>
+            <a:r>
+              <a:rPr sz="1250" b="1">
+                <a:solidFill>
+                  <a:srgbClr val="1B254B"/>
+                </a:solidFill>
+                <a:latin typeface="Meiryo"/>
+              </a:rPr>
+              <a:t>（diffuse rain）</a:t>
             </a:r>
           </a:p>
         </p:txBody>
@@ -27832,7 +27870,26 @@
                 </a:solidFill>
                 <a:latin typeface="Meiryo"/>
               </a:rPr>
-              <a:t>放射伝達（radiosity / ART）</a:t>
+              <a:t>放射伝達</a:t>
+            </a:r>
+          </a:p>
+          <a:p>
+            <a:pPr algn="ctr">
+              <a:lnSpc>
+                <a:spcPct val="115000"/>
+              </a:lnSpc>
+              <a:spcAft>
+                <a:spcPts val="0"/>
+              </a:spcAft>
+            </a:pPr>
+            <a:r>
+              <a:rPr sz="1250" b="1">
+                <a:solidFill>
+                  <a:srgbClr val="1B254B"/>
+                </a:solidFill>
+                <a:latin typeface="Meiryo"/>
+              </a:rPr>
+              <a:t>（radiosity / ART）</a:t>
             </a:r>
           </a:p>
         </p:txBody>
